--- a/media/resources/files/EkiOrunduuOnduktar_Boluu_JenilOrtoOor_UOs54tT.pptx
+++ b/media/resources/files/EkiOrunduuOnduktar_Boluu_JenilOrtoOor_UOs54tT.pptx
@@ -7612,7 +7612,7 @@
                 <a:ea typeface="+mn-ea"/>
                 <a:cs typeface="+mn-cs"/>
               </a:rPr>
-              <a:t>Турдуу пикирлер учун ыраазычылык билдиребиз.</a:t>
+              <a:t>Түрдүү пикирлер үчүн ыраазычылык билдиребиз.</a:t>
             </a:r>
           </a:p>
           <a:p>

--- a/media/resources/files/EkiOrunduuOnduktar_Boluu_JenilOrtoOor_UOs54tT.pptx
+++ b/media/resources/files/EkiOrunduuOnduktar_Boluu_JenilOrtoOor_UOs54tT.pptx
@@ -2021,7 +2021,7 @@
             <a:pPr algn="ctr"/>
             <a:r>
               <a:rPr lang="en-GB" sz="2000" dirty="0"/>
-              <a:t>4 ÷ 0.2</a:t>
+              <a:t>4 ÷ 0,2</a:t>
             </a:r>
           </a:p>
         </p:txBody>
@@ -2098,7 +2098,7 @@
             <a:pPr algn="ctr"/>
             <a:r>
               <a:rPr lang="en-GB" sz="2000" dirty="0"/>
-              <a:t>15 ÷ 0.5</a:t>
+              <a:t>15 ÷ 0,5</a:t>
             </a:r>
           </a:p>
         </p:txBody>
@@ -2175,7 +2175,7 @@
             <a:pPr algn="ctr"/>
             <a:r>
               <a:rPr lang="en-GB" sz="2000" dirty="0"/>
-              <a:t>6 ÷ 1.2</a:t>
+              <a:t>6 ÷ 1,2</a:t>
             </a:r>
           </a:p>
         </p:txBody>
@@ -2252,7 +2252,7 @@
             <a:pPr algn="ctr"/>
             <a:r>
               <a:rPr lang="en-GB" sz="2000" dirty="0"/>
-              <a:t>9 ÷ 1.5</a:t>
+              <a:t>9 ÷ 1,5</a:t>
             </a:r>
           </a:p>
         </p:txBody>
@@ -2329,7 +2329,7 @@
             <a:pPr algn="ctr"/>
             <a:r>
               <a:rPr lang="en-GB" sz="2000" dirty="0"/>
-              <a:t>6 ÷ 0.03</a:t>
+              <a:t>6 ÷ 0,03</a:t>
             </a:r>
           </a:p>
         </p:txBody>
@@ -2406,7 +2406,7 @@
             <a:pPr algn="ctr"/>
             <a:r>
               <a:rPr lang="en-GB" sz="2000" dirty="0"/>
-              <a:t>3.6 ÷ 0.08</a:t>
+              <a:t>3,6 ÷ 0,08</a:t>
             </a:r>
           </a:p>
         </p:txBody>
@@ -2524,7 +2524,7 @@
             <a:pPr algn="ctr"/>
             <a:r>
               <a:rPr lang="en-GB" sz="2000" dirty="0"/>
-              <a:t>3 ÷ 0.15</a:t>
+              <a:t>3 ÷ 0,15</a:t>
             </a:r>
           </a:p>
         </p:txBody>
@@ -2601,7 +2601,7 @@
             <a:pPr algn="ctr"/>
             <a:r>
               <a:rPr lang="en-GB" sz="2000" dirty="0"/>
-              <a:t>4.2 ÷ 0.12</a:t>
+              <a:t>4,2 ÷ 0,12</a:t>
             </a:r>
           </a:p>
         </p:txBody>
@@ -2678,7 +2678,7 @@
             <a:pPr algn="ctr"/>
             <a:r>
               <a:rPr lang="en-GB" sz="2000" dirty="0"/>
-              <a:t>0.96 ÷ 0.32</a:t>
+              <a:t>0,96 ÷ 0,32</a:t>
             </a:r>
           </a:p>
         </p:txBody>
@@ -2755,7 +2755,7 @@
             <a:pPr algn="ctr"/>
             <a:r>
               <a:rPr lang="en-GB" sz="2000" dirty="0"/>
-              <a:t>86.7 ÷ 1.7</a:t>
+              <a:t>86,7 ÷ 1,7</a:t>
             </a:r>
           </a:p>
         </p:txBody>
@@ -2832,7 +2832,7 @@
             <a:pPr algn="ctr"/>
             <a:r>
               <a:rPr lang="en-GB" sz="2000" dirty="0"/>
-              <a:t>5.72 ÷ 0.26</a:t>
+              <a:t>5,72 ÷ 0,26</a:t>
             </a:r>
           </a:p>
         </p:txBody>
@@ -2909,7 +2909,7 @@
             <a:pPr algn="ctr"/>
             <a:r>
               <a:rPr lang="en-GB" sz="2000" dirty="0"/>
-              <a:t>15.12 ÷ 0.42</a:t>
+              <a:t>15,12 ÷ 0,42</a:t>
             </a:r>
           </a:p>
         </p:txBody>
@@ -3027,7 +3027,7 @@
             <a:pPr algn="ctr"/>
             <a:r>
               <a:rPr lang="en-GB" sz="2000" dirty="0"/>
-              <a:t>6 ÷ 0.02</a:t>
+              <a:t>6 ÷ 0,02</a:t>
             </a:r>
           </a:p>
         </p:txBody>
@@ -3104,7 +3104,7 @@
             <a:pPr algn="ctr"/>
             <a:r>
               <a:rPr lang="en-GB" sz="2000" dirty="0"/>
-              <a:t>20 ÷ 0.04</a:t>
+              <a:t>20 ÷ 0,04</a:t>
             </a:r>
           </a:p>
         </p:txBody>
@@ -3181,7 +3181,7 @@
             <a:pPr algn="ctr"/>
             <a:r>
               <a:rPr lang="en-GB" sz="2000" dirty="0"/>
-              <a:t>9.1 ÷ 0.13</a:t>
+              <a:t>9,1 ÷ 0,13</a:t>
             </a:r>
           </a:p>
         </p:txBody>
@@ -3258,7 +3258,7 @@
             <a:pPr algn="ctr"/>
             <a:r>
               <a:rPr lang="en-GB" sz="2000" dirty="0"/>
-              <a:t>9.35 ÷ 1.1</a:t>
+              <a:t>9,35 ÷ 1,1</a:t>
             </a:r>
           </a:p>
         </p:txBody>
@@ -3335,7 +3335,7 @@
             <a:pPr algn="ctr"/>
             <a:r>
               <a:rPr lang="en-GB" sz="2000" dirty="0"/>
-              <a:t>13.94 ÷ 3.4</a:t>
+              <a:t>13,94 ÷ 3,4</a:t>
             </a:r>
           </a:p>
         </p:txBody>
@@ -3412,7 +3412,7 @@
             <a:pPr algn="ctr"/>
             <a:r>
               <a:rPr lang="en-GB" sz="2000" dirty="0"/>
-              <a:t>7.81 ÷ 1.42</a:t>
+              <a:t>7,81 ÷ 1,42</a:t>
             </a:r>
           </a:p>
         </p:txBody>
@@ -3914,7 +3914,7 @@
             <a:pPr algn="ctr"/>
             <a:r>
               <a:rPr lang="en-GB" sz="2000" dirty="0"/>
-              <a:t>4 ÷ 0.2</a:t>
+              <a:t>4 ÷ 0,2</a:t>
             </a:r>
           </a:p>
         </p:txBody>
@@ -4033,7 +4033,7 @@
             <a:pPr algn="ctr"/>
             <a:r>
               <a:rPr lang="en-GB" sz="2000" dirty="0"/>
-              <a:t>15 ÷ 0.5</a:t>
+              <a:t>15 ÷ 0,5</a:t>
             </a:r>
           </a:p>
         </p:txBody>
@@ -4152,7 +4152,7 @@
             <a:pPr algn="ctr"/>
             <a:r>
               <a:rPr lang="en-GB" sz="2000" dirty="0"/>
-              <a:t>6 ÷ 1.2</a:t>
+              <a:t>6 ÷ 1,2</a:t>
             </a:r>
           </a:p>
         </p:txBody>
@@ -4271,7 +4271,7 @@
             <a:pPr algn="ctr"/>
             <a:r>
               <a:rPr lang="en-GB" sz="2000" dirty="0"/>
-              <a:t>9 ÷ 1.5</a:t>
+              <a:t>9 ÷ 1,5</a:t>
             </a:r>
           </a:p>
         </p:txBody>
@@ -4390,7 +4390,7 @@
             <a:pPr algn="ctr"/>
             <a:r>
               <a:rPr lang="en-GB" sz="2000" dirty="0"/>
-              <a:t>6 ÷ 0.03</a:t>
+              <a:t>6 ÷ 0,03</a:t>
             </a:r>
           </a:p>
         </p:txBody>
@@ -4509,7 +4509,7 @@
             <a:pPr algn="ctr"/>
             <a:r>
               <a:rPr lang="en-GB" sz="2000" dirty="0"/>
-              <a:t>3.6 ÷ 0.08</a:t>
+              <a:t>3,6 ÷ 0,08</a:t>
             </a:r>
           </a:p>
         </p:txBody>
@@ -4669,7 +4669,7 @@
             <a:pPr algn="ctr"/>
             <a:r>
               <a:rPr lang="en-GB" sz="2000" dirty="0"/>
-              <a:t>3 ÷ 0.15</a:t>
+              <a:t>3 ÷ 0,15</a:t>
             </a:r>
           </a:p>
         </p:txBody>
@@ -4788,7 +4788,7 @@
             <a:pPr algn="ctr"/>
             <a:r>
               <a:rPr lang="en-GB" sz="2000" dirty="0"/>
-              <a:t>4.2 ÷ 0.12</a:t>
+              <a:t>4,2 ÷ 0,12</a:t>
             </a:r>
           </a:p>
         </p:txBody>
@@ -4907,7 +4907,7 @@
             <a:pPr algn="ctr"/>
             <a:r>
               <a:rPr lang="en-GB" sz="2000" dirty="0"/>
-              <a:t>0.96 ÷ 0.32</a:t>
+              <a:t>0,96 ÷ 0,32</a:t>
             </a:r>
           </a:p>
         </p:txBody>
@@ -5026,7 +5026,7 @@
             <a:pPr algn="ctr"/>
             <a:r>
               <a:rPr lang="en-GB" sz="2000" dirty="0"/>
-              <a:t>86.7 ÷ 1.7</a:t>
+              <a:t>86,7 ÷ 1,7</a:t>
             </a:r>
           </a:p>
         </p:txBody>
@@ -5145,7 +5145,7 @@
             <a:pPr algn="ctr"/>
             <a:r>
               <a:rPr lang="en-GB" sz="2000" dirty="0"/>
-              <a:t>5.72 ÷ 0.26</a:t>
+              <a:t>5,72 ÷ 0,26</a:t>
             </a:r>
           </a:p>
         </p:txBody>
@@ -5264,7 +5264,7 @@
             <a:pPr algn="ctr"/>
             <a:r>
               <a:rPr lang="en-GB" sz="2000" dirty="0"/>
-              <a:t>15.12 ÷ 0.42</a:t>
+              <a:t>15,12 ÷ 0,42</a:t>
             </a:r>
           </a:p>
         </p:txBody>
@@ -5424,7 +5424,7 @@
             <a:pPr algn="ctr"/>
             <a:r>
               <a:rPr lang="en-GB" sz="2000" dirty="0"/>
-              <a:t>6 ÷ 0.02</a:t>
+              <a:t>6 ÷ 0,02</a:t>
             </a:r>
           </a:p>
         </p:txBody>
@@ -5543,7 +5543,7 @@
             <a:pPr algn="ctr"/>
             <a:r>
               <a:rPr lang="en-GB" sz="2000" dirty="0"/>
-              <a:t>20 ÷ 0.04</a:t>
+              <a:t>20 ÷ 0,04</a:t>
             </a:r>
           </a:p>
         </p:txBody>
@@ -5662,7 +5662,7 @@
             <a:pPr algn="ctr"/>
             <a:r>
               <a:rPr lang="en-GB" sz="2000" dirty="0"/>
-              <a:t>9.1 ÷ 0.13</a:t>
+              <a:t>9,1 ÷ 0,13</a:t>
             </a:r>
           </a:p>
         </p:txBody>
@@ -5745,7 +5745,7 @@
           <a:p>
             <a:r>
               <a:rPr lang="en-GB" sz="2000" dirty="0"/>
-              <a:t>= 8.5</a:t>
+              <a:t>= 8,5</a:t>
             </a:r>
           </a:p>
         </p:txBody>
@@ -5781,7 +5781,7 @@
             <a:pPr algn="ctr"/>
             <a:r>
               <a:rPr lang="en-GB" sz="2000" dirty="0"/>
-              <a:t>9.35 ÷ 1.1</a:t>
+              <a:t>9,35 ÷ 1,1</a:t>
             </a:r>
           </a:p>
         </p:txBody>
@@ -5864,7 +5864,7 @@
           <a:p>
             <a:r>
               <a:rPr lang="en-GB" sz="2000" dirty="0"/>
-              <a:t>= 4.1</a:t>
+              <a:t>= 4,1</a:t>
             </a:r>
           </a:p>
         </p:txBody>
@@ -5900,7 +5900,7 @@
             <a:pPr algn="ctr"/>
             <a:r>
               <a:rPr lang="en-GB" sz="2000" dirty="0"/>
-              <a:t>13.94 ÷ 3.4</a:t>
+              <a:t>13,94 ÷ 3,4</a:t>
             </a:r>
           </a:p>
         </p:txBody>
@@ -5983,7 +5983,7 @@
           <a:p>
             <a:r>
               <a:rPr lang="en-GB" sz="2000" dirty="0"/>
-              <a:t>= 5.5</a:t>
+              <a:t>= 5,5</a:t>
             </a:r>
           </a:p>
         </p:txBody>
@@ -6019,7 +6019,7 @@
             <a:pPr algn="ctr"/>
             <a:r>
               <a:rPr lang="en-GB" sz="2000" dirty="0"/>
-              <a:t>7.81 ÷ 1.42</a:t>
+              <a:t>7,81 ÷ 1,42</a:t>
             </a:r>
           </a:p>
         </p:txBody>
